--- a/Schools_ML_Track/camp_2026/slides/ML/ML19.pptx
+++ b/Schools_ML_Track/camp_2026/slides/ML/ML19.pptx
@@ -127,7 +127,7 @@
   <p:extLst>
     <p:ext uri="{521415D9-36F7-43E2-AB2F-B90AF26B5E84}">
       <p14:sectionLst xmlns:p14="http://schemas.microsoft.com/office/powerpoint/2010/main">
-        <p14:section name="Opening" id="{5c9a32cb-1c8d-8eb9-5a8d-d99f8d39d4c3}">
+        <p14:section name="Opening" id="{f0b112a5-651a-4883-17be-5915fb2e190a}">
           <p14:sldIdLst>
             <p14:sldId id="256"/>
             <p14:sldId id="257"/>
@@ -138,7 +138,7 @@
             <p14:sldId id="262"/>
           </p14:sldIdLst>
         </p14:section>
-        <p14:section name="Block A" id="{7433d59c-f777-7848-01a0-d186b654ad78}">
+        <p14:section name="Block A" id="{480a5f0c-1ec6-0856-1d39-5da5387589d3}">
           <p14:sldIdLst>
             <p14:sldId id="263"/>
             <p14:sldId id="264"/>
@@ -147,15 +147,15 @@
             <p14:sldId id="268"/>
           </p14:sldIdLst>
         </p14:section>
-        <p14:section name="Break" id="{08cb1086-4638-2b96-de7e-7ae2c8cfa30a}">
+        <p14:section name="Break" id="{991ccbbe-80c0-72f5-080d-3ccfcc32ed33}">
           <p14:sldIdLst>
             <p14:sldId id="267"/>
           </p14:sldIdLst>
         </p14:section>
-        <p14:section name="Block A" id="{81d4da49-69aa-cae2-fdee-3195c6992f3e}">
+        <p14:section name="Block A" id="{7a640cb1-eda3-27cf-5585-b18649cafa99}">
           <p14:sldIdLst/>
         </p14:section>
-        <p14:section name="Block B" id="{9718e310-a944-4714-d90b-5785abdfb452}">
+        <p14:section name="Block B" id="{e2cc279b-342f-3cc5-f620-a32399699d5f}">
           <p14:sldIdLst>
             <p14:sldId id="269"/>
             <p14:sldId id="270"/>
@@ -164,7 +164,7 @@
             <p14:sldId id="273"/>
           </p14:sldIdLst>
         </p14:section>
-        <p14:section name="Make and close" id="{c8848c5d-cc68-9070-9cfb-39b4dd31e443}">
+        <p14:section name="Make and close" id="{7557e2a1-74f2-656a-6ebf-196ca4ee08a1}">
           <p14:sldIdLst>
             <p14:sldId id="274"/>
             <p14:sldId id="275"/>

--- a/Schools_ML_Track/camp_2026/slides/ML/ML19.pptx
+++ b/Schools_ML_Track/camp_2026/slides/ML/ML19.pptx
@@ -127,7 +127,7 @@
   <p:extLst>
     <p:ext uri="{521415D9-36F7-43E2-AB2F-B90AF26B5E84}">
       <p14:sectionLst xmlns:p14="http://schemas.microsoft.com/office/powerpoint/2010/main">
-        <p14:section name="Opening" id="{f0b112a5-651a-4883-17be-5915fb2e190a}">
+        <p14:section name="Opening" id="{131c97d8-4e9f-386d-9fac-2675d9a18b7e}">
           <p14:sldIdLst>
             <p14:sldId id="256"/>
             <p14:sldId id="257"/>
@@ -138,7 +138,7 @@
             <p14:sldId id="262"/>
           </p14:sldIdLst>
         </p14:section>
-        <p14:section name="Block A" id="{480a5f0c-1ec6-0856-1d39-5da5387589d3}">
+        <p14:section name="Block A" id="{6c01f1d8-f663-5498-6dcb-ac0a68a6d965}">
           <p14:sldIdLst>
             <p14:sldId id="263"/>
             <p14:sldId id="264"/>
@@ -147,15 +147,15 @@
             <p14:sldId id="268"/>
           </p14:sldIdLst>
         </p14:section>
-        <p14:section name="Break" id="{991ccbbe-80c0-72f5-080d-3ccfcc32ed33}">
+        <p14:section name="Break" id="{47036bfe-92cd-b431-64f2-f80c0a4c4f4c}">
           <p14:sldIdLst>
             <p14:sldId id="267"/>
           </p14:sldIdLst>
         </p14:section>
-        <p14:section name="Block A" id="{7a640cb1-eda3-27cf-5585-b18649cafa99}">
+        <p14:section name="Block A" id="{c03394d1-d6f1-57ff-e149-ea5951778b30}">
           <p14:sldIdLst/>
         </p14:section>
-        <p14:section name="Block B" id="{e2cc279b-342f-3cc5-f620-a32399699d5f}">
+        <p14:section name="Block B" id="{8f491785-a22a-2d8c-dfc9-b08b14a994af}">
           <p14:sldIdLst>
             <p14:sldId id="269"/>
             <p14:sldId id="270"/>
@@ -164,7 +164,7 @@
             <p14:sldId id="273"/>
           </p14:sldIdLst>
         </p14:section>
-        <p14:section name="Make and close" id="{7557e2a1-74f2-656a-6ebf-196ca4ee08a1}">
+        <p14:section name="Make and close" id="{9b7377a1-53ed-3f6d-4685-a4bcf3ee5014}">
           <p14:sldIdLst>
             <p14:sldId id="274"/>
             <p14:sldId id="275"/>
@@ -5099,15 +5099,15 @@
           <a:p>
             <a:pPr algn="l" indent="0" marL="0">
               <a:lnSpc>
-                <a:spcPts val="3600"/>
+                <a:spcPts val="3360"/>
               </a:lnSpc>
               <a:spcAft>
-                <a:spcPts val="2520"/>
+                <a:spcPts val="2020"/>
               </a:spcAft>
               <a:buNone/>
             </a:pPr>
             <a:r>
-              <a:rPr lang="en-US" sz="3000" dirty="0">
+              <a:rPr lang="en-US" sz="2800" dirty="0">
                 <a:solidFill>
                   <a:srgbClr val="111111"/>
                 </a:solidFill>
@@ -5115,22 +5115,22 @@
                 <a:ea typeface="Lato" pitchFamily="34" charset="-122"/>
                 <a:cs typeface="Lato" pitchFamily="34" charset="-120"/>
               </a:rPr>
-              <a:t>Write PROJECT_PLAN.md using the seven headings. Name one leakage column and exclude it. Ask the instructor to approve the scope before you build.</a:t>
-            </a:r>
-            <a:endParaRPr lang="en-US" sz="3000" dirty="0"/>
+              <a:t>Write PROJECT_PLAN.md using the seven headings.</a:t>
+            </a:r>
+            <a:endParaRPr lang="en-US" sz="2800" dirty="0"/>
           </a:p>
           <a:p>
             <a:pPr algn="l" indent="0" marL="0">
               <a:lnSpc>
-                <a:spcPts val="3600"/>
+                <a:spcPts val="3360"/>
               </a:lnSpc>
               <a:spcAft>
-                <a:spcPts val="2520"/>
+                <a:spcPts val="2020"/>
               </a:spcAft>
               <a:buNone/>
             </a:pPr>
             <a:r>
-              <a:rPr lang="en-US" sz="3000" dirty="0">
+              <a:rPr lang="en-US" sz="2800" dirty="0">
                 <a:solidFill>
                   <a:srgbClr val="111111"/>
                 </a:solidFill>
@@ -5138,9 +5138,55 @@
                 <a:ea typeface="Lato" pitchFamily="34" charset="-122"/>
                 <a:cs typeface="Lato" pitchFamily="34" charset="-120"/>
               </a:rPr>
+              <a:t>Name one leakage column and exclude it.</a:t>
+            </a:r>
+            <a:endParaRPr lang="en-US" sz="2800" dirty="0"/>
+          </a:p>
+          <a:p>
+            <a:pPr algn="l" indent="0" marL="0">
+              <a:lnSpc>
+                <a:spcPts val="3360"/>
+              </a:lnSpc>
+              <a:spcAft>
+                <a:spcPts val="2020"/>
+              </a:spcAft>
+              <a:buNone/>
+            </a:pPr>
+            <a:r>
+              <a:rPr lang="en-US" sz="2800" dirty="0">
+                <a:solidFill>
+                  <a:srgbClr val="111111"/>
+                </a:solidFill>
+                <a:latin typeface="Lato" pitchFamily="34" charset="0"/>
+                <a:ea typeface="Lato" pitchFamily="34" charset="-122"/>
+                <a:cs typeface="Lato" pitchFamily="34" charset="-120"/>
+              </a:rPr>
+              <a:t>Ask the instructor to approve the scope before you build.</a:t>
+            </a:r>
+            <a:endParaRPr lang="en-US" sz="2800" dirty="0"/>
+          </a:p>
+          <a:p>
+            <a:pPr algn="l" indent="0" marL="0">
+              <a:lnSpc>
+                <a:spcPts val="3360"/>
+              </a:lnSpc>
+              <a:spcAft>
+                <a:spcPts val="2020"/>
+              </a:spcAft>
+              <a:buNone/>
+            </a:pPr>
+            <a:r>
+              <a:rPr lang="en-US" sz="2800" dirty="0">
+                <a:solidFill>
+                  <a:srgbClr val="111111"/>
+                </a:solidFill>
+                <a:latin typeface="Lato" pitchFamily="34" charset="0"/>
+                <a:ea typeface="Lato" pitchFamily="34" charset="-122"/>
+                <a:cs typeface="Lato" pitchFamily="34" charset="-120"/>
+              </a:rPr>
               <a:t>Save it as ML19. Write two sentences: what you changed and how you checked it.</a:t>
             </a:r>
-            <a:endParaRPr lang="en-US" sz="3000" dirty="0"/>
+            <a:endParaRPr lang="en-US" sz="2800" dirty="0"/>
           </a:p>
         </p:txBody>
       </p:sp>
@@ -7642,11 +7688,11 @@
         <p:spPr>
           <a:xfrm>
             <a:off x="640080" y="1645920"/>
-            <a:ext cx="10881360" cy="3383280"/>
+            <a:ext cx="10881360" cy="2964942"/>
           </a:xfrm>
           <a:prstGeom prst="roundRect">
             <a:avLst>
-              <a:gd name="adj" fmla="val 2162"/>
+              <a:gd name="adj" fmla="val 2467"/>
             </a:avLst>
           </a:prstGeom>
           <a:solidFill>
@@ -7664,7 +7710,7 @@
         <p:spPr>
           <a:xfrm>
             <a:off x="841248" y="1847088"/>
-            <a:ext cx="10479024" cy="2980944"/>
+            <a:ext cx="10479024" cy="2562606"/>
           </a:xfrm>
           <a:prstGeom prst="rect">
             <a:avLst/>
@@ -7678,12 +7724,12 @@
           <a:p>
             <a:pPr algn="l" indent="0" marL="0">
               <a:lnSpc>
-                <a:spcPts val="2340"/>
+                <a:spcPts val="2210"/>
               </a:lnSpc>
               <a:buNone/>
             </a:pPr>
             <a:r>
-              <a:rPr lang="en-US" sz="1800" b="1" dirty="0">
+              <a:rPr lang="en-US" sz="1700" b="1" dirty="0">
                 <a:solidFill>
                   <a:srgbClr val="FFFFFF"/>
                 </a:solidFill>
@@ -7695,12 +7741,12 @@
             </a:r>
             <a:pPr algn="l" indent="0" marL="0">
               <a:lnSpc>
-                <a:spcPts val="2340"/>
+                <a:spcPts val="2210"/>
               </a:lnSpc>
               <a:buNone/>
             </a:pPr>
             <a:r>
-              <a:rPr lang="en-US" sz="1800" dirty="0">
+              <a:rPr lang="en-US" sz="1700" dirty="0">
                 <a:solidFill>
                   <a:srgbClr val="FFFFFF"/>
                 </a:solidFill>
@@ -7712,12 +7758,12 @@
             </a:r>
             <a:pPr algn="l" indent="0" marL="0">
               <a:lnSpc>
-                <a:spcPts val="2340"/>
+                <a:spcPts val="2210"/>
               </a:lnSpc>
               <a:buNone/>
             </a:pPr>
             <a:r>
-              <a:rPr lang="en-US" sz="1800" b="1" dirty="0">
+              <a:rPr lang="en-US" sz="1700" b="1" dirty="0">
                 <a:solidFill>
                   <a:srgbClr val="FFFFFF"/>
                 </a:solidFill>
@@ -7729,12 +7775,12 @@
             </a:r>
             <a:pPr algn="l" indent="0" marL="0">
               <a:lnSpc>
-                <a:spcPts val="2340"/>
+                <a:spcPts val="2210"/>
               </a:lnSpc>
               <a:buNone/>
             </a:pPr>
             <a:r>
-              <a:rPr lang="en-US" sz="1800" dirty="0">
+              <a:rPr lang="en-US" sz="1700" dirty="0">
                 <a:solidFill>
                   <a:srgbClr val="FFFFFF"/>
                 </a:solidFill>
@@ -7744,17 +7790,17 @@
               </a:rPr>
               <a:t> pd</a:t>
             </a:r>
-            <a:endParaRPr lang="en-US" sz="1800" dirty="0"/>
+            <a:endParaRPr lang="en-US" sz="1700" dirty="0"/>
           </a:p>
           <a:p>
             <a:pPr algn="l" indent="0" marL="0">
               <a:lnSpc>
-                <a:spcPts val="2340"/>
+                <a:spcPts val="2210"/>
               </a:lnSpc>
               <a:buNone/>
             </a:pPr>
             <a:r>
-              <a:rPr lang="en-US" sz="1800" dirty="0">
+              <a:rPr lang="en-US" sz="1700" dirty="0">
                 <a:solidFill>
                   <a:srgbClr val="FFFFFF"/>
                 </a:solidFill>
@@ -7766,12 +7812,12 @@
             </a:r>
             <a:pPr algn="l" indent="0" marL="0">
               <a:lnSpc>
-                <a:spcPts val="2340"/>
+                <a:spcPts val="2210"/>
               </a:lnSpc>
               <a:buNone/>
             </a:pPr>
             <a:r>
-              <a:rPr lang="en-US" sz="1800" dirty="0">
+              <a:rPr lang="en-US" sz="1700" dirty="0">
                 <a:solidFill>
                   <a:srgbClr val="E0BE36"/>
                 </a:solidFill>
@@ -7783,12 +7829,12 @@
             </a:r>
             <a:pPr algn="l" indent="0" marL="0">
               <a:lnSpc>
-                <a:spcPts val="2340"/>
+                <a:spcPts val="2210"/>
               </a:lnSpc>
               <a:buNone/>
             </a:pPr>
             <a:r>
-              <a:rPr lang="en-US" sz="1800" dirty="0">
+              <a:rPr lang="en-US" sz="1700" dirty="0">
                 <a:solidFill>
                   <a:srgbClr val="FFFFFF"/>
                 </a:solidFill>
@@ -7798,17 +7844,17 @@
               </a:rPr>
               <a:t>)</a:t>
             </a:r>
-            <a:endParaRPr lang="en-US" sz="1800" dirty="0"/>
+            <a:endParaRPr lang="en-US" sz="1700" dirty="0"/>
           </a:p>
           <a:p>
             <a:pPr algn="l" indent="0" marL="0">
               <a:lnSpc>
-                <a:spcPts val="2340"/>
+                <a:spcPts val="2210"/>
               </a:lnSpc>
               <a:buNone/>
             </a:pPr>
             <a:r>
-              <a:rPr lang="en-US" sz="1800" dirty="0">
+              <a:rPr lang="en-US" sz="1700" dirty="0">
                 <a:solidFill>
                   <a:srgbClr val="FFFFFF"/>
                 </a:solidFill>
@@ -7818,17 +7864,17 @@
               </a:rPr>
               <a:t>print(fares.shape)</a:t>
             </a:r>
-            <a:endParaRPr lang="en-US" sz="1800" dirty="0"/>
+            <a:endParaRPr lang="en-US" sz="1700" dirty="0"/>
           </a:p>
           <a:p>
             <a:pPr algn="l" indent="0" marL="0">
               <a:lnSpc>
-                <a:spcPts val="2340"/>
+                <a:spcPts val="2210"/>
               </a:lnSpc>
               <a:buNone/>
             </a:pPr>
             <a:r>
-              <a:rPr lang="en-US" sz="1800" dirty="0">
+              <a:rPr lang="en-US" sz="1700" dirty="0">
                 <a:solidFill>
                   <a:srgbClr val="FFFFFF"/>
                 </a:solidFill>
@@ -7836,19 +7882,19 @@
                 <a:ea typeface="Courier New" pitchFamily="34" charset="-122"/>
                 <a:cs typeface="Courier New" pitchFamily="34" charset="-120"/>
               </a:rPr>
-              <a:t>corr = fares[</a:t>
-            </a:r>
-            <a:endParaRPr lang="en-US" sz="1800" dirty="0"/>
+              <a:t>corr = (</a:t>
+            </a:r>
+            <a:endParaRPr lang="en-US" sz="1700" dirty="0"/>
           </a:p>
           <a:p>
             <a:pPr algn="l" indent="0" marL="0">
               <a:lnSpc>
-                <a:spcPts val="2340"/>
+                <a:spcPts val="2210"/>
               </a:lnSpc>
               <a:buNone/>
             </a:pPr>
             <a:r>
-              <a:rPr lang="en-US" sz="1800" dirty="0">
+              <a:rPr lang="en-US" sz="1700" dirty="0">
                 <a:solidFill>
                   <a:srgbClr val="FFFFFF"/>
                 </a:solidFill>
@@ -7856,175 +7902,169 @@
                 <a:ea typeface="Courier New" pitchFamily="34" charset="-122"/>
                 <a:cs typeface="Courier New" pitchFamily="34" charset="-120"/>
               </a:rPr>
-              <a:t>    [</a:t>
-            </a:r>
-            <a:endParaRPr lang="en-US" sz="1800" dirty="0"/>
-          </a:p>
-          <a:p>
+              <a:t>    fares[[</a:t>
+            </a:r>
             <a:pPr algn="l" indent="0" marL="0">
               <a:lnSpc>
-                <a:spcPts val="2340"/>
+                <a:spcPts val="2210"/>
               </a:lnSpc>
               <a:buNone/>
             </a:pPr>
             <a:r>
-              <a:rPr lang="en-US" sz="1800" dirty="0">
-                <a:solidFill>
-                  <a:srgbClr val="FFFFFF"/>
+              <a:rPr lang="en-US" sz="1700" dirty="0">
+                <a:solidFill>
+                  <a:srgbClr val="E0BE36"/>
                 </a:solidFill>
                 <a:latin typeface="Courier New" pitchFamily="34" charset="0"/>
                 <a:ea typeface="Courier New" pitchFamily="34" charset="-122"/>
                 <a:cs typeface="Courier New" pitchFamily="34" charset="-120"/>
               </a:rPr>
-              <a:t>        </a:t>
+              <a:t>"distance_km"</a:t>
             </a:r>
             <a:pPr algn="l" indent="0" marL="0">
               <a:lnSpc>
-                <a:spcPts val="2340"/>
+                <a:spcPts val="2210"/>
               </a:lnSpc>
               <a:buNone/>
             </a:pPr>
             <a:r>
-              <a:rPr lang="en-US" sz="1800" dirty="0">
-                <a:solidFill>
-                  <a:srgbClr val="E0BE36"/>
+              <a:rPr lang="en-US" sz="1700" dirty="0">
+                <a:solidFill>
+                  <a:srgbClr val="FFFFFF"/>
                 </a:solidFill>
                 <a:latin typeface="Courier New" pitchFamily="34" charset="0"/>
                 <a:ea typeface="Courier New" pitchFamily="34" charset="-122"/>
                 <a:cs typeface="Courier New" pitchFamily="34" charset="-120"/>
               </a:rPr>
-              <a:t>"distance_km"</a:t>
+              <a:t>, </a:t>
             </a:r>
             <a:pPr algn="l" indent="0" marL="0">
               <a:lnSpc>
-                <a:spcPts val="2340"/>
+                <a:spcPts val="2210"/>
               </a:lnSpc>
               <a:buNone/>
             </a:pPr>
             <a:r>
-              <a:rPr lang="en-US" sz="1800" dirty="0">
-                <a:solidFill>
-                  <a:srgbClr val="FFFFFF"/>
+              <a:rPr lang="en-US" sz="1700" dirty="0">
+                <a:solidFill>
+                  <a:srgbClr val="E0BE36"/>
                 </a:solidFill>
                 <a:latin typeface="Courier New" pitchFamily="34" charset="0"/>
                 <a:ea typeface="Courier New" pitchFamily="34" charset="-122"/>
                 <a:cs typeface="Courier New" pitchFamily="34" charset="-120"/>
               </a:rPr>
-              <a:t>, </a:t>
+              <a:t>"rush_hour"</a:t>
             </a:r>
             <a:pPr algn="l" indent="0" marL="0">
               <a:lnSpc>
-                <a:spcPts val="2340"/>
+                <a:spcPts val="2210"/>
               </a:lnSpc>
               <a:buNone/>
             </a:pPr>
             <a:r>
-              <a:rPr lang="en-US" sz="1800" dirty="0">
-                <a:solidFill>
-                  <a:srgbClr val="E0BE36"/>
+              <a:rPr lang="en-US" sz="1700" dirty="0">
+                <a:solidFill>
+                  <a:srgbClr val="FFFFFF"/>
                 </a:solidFill>
                 <a:latin typeface="Courier New" pitchFamily="34" charset="0"/>
                 <a:ea typeface="Courier New" pitchFamily="34" charset="-122"/>
                 <a:cs typeface="Courier New" pitchFamily="34" charset="-120"/>
               </a:rPr>
-              <a:t>"rush_hour"</a:t>
+              <a:t>, </a:t>
             </a:r>
             <a:pPr algn="l" indent="0" marL="0">
               <a:lnSpc>
-                <a:spcPts val="2340"/>
+                <a:spcPts val="2210"/>
               </a:lnSpc>
               <a:buNone/>
             </a:pPr>
             <a:r>
-              <a:rPr lang="en-US" sz="1800" dirty="0">
-                <a:solidFill>
-                  <a:srgbClr val="FFFFFF"/>
+              <a:rPr lang="en-US" sz="1700" dirty="0">
+                <a:solidFill>
+                  <a:srgbClr val="E0BE36"/>
                 </a:solidFill>
                 <a:latin typeface="Courier New" pitchFamily="34" charset="0"/>
                 <a:ea typeface="Courier New" pitchFamily="34" charset="-122"/>
                 <a:cs typeface="Courier New" pitchFamily="34" charset="-120"/>
               </a:rPr>
-              <a:t>, </a:t>
+              <a:t>"raining"</a:t>
             </a:r>
             <a:pPr algn="l" indent="0" marL="0">
               <a:lnSpc>
-                <a:spcPts val="2340"/>
+                <a:spcPts val="2210"/>
               </a:lnSpc>
               <a:buNone/>
             </a:pPr>
             <a:r>
-              <a:rPr lang="en-US" sz="1800" dirty="0">
-                <a:solidFill>
-                  <a:srgbClr val="E0BE36"/>
+              <a:rPr lang="en-US" sz="1700" dirty="0">
+                <a:solidFill>
+                  <a:srgbClr val="FFFFFF"/>
                 </a:solidFill>
                 <a:latin typeface="Courier New" pitchFamily="34" charset="0"/>
                 <a:ea typeface="Courier New" pitchFamily="34" charset="-122"/>
                 <a:cs typeface="Courier New" pitchFamily="34" charset="-120"/>
               </a:rPr>
-              <a:t>"raining"</a:t>
+              <a:t>, </a:t>
             </a:r>
             <a:pPr algn="l" indent="0" marL="0">
               <a:lnSpc>
-                <a:spcPts val="2340"/>
+                <a:spcPts val="2210"/>
               </a:lnSpc>
               <a:buNone/>
             </a:pPr>
             <a:r>
-              <a:rPr lang="en-US" sz="1800" dirty="0">
-                <a:solidFill>
-                  <a:srgbClr val="FFFFFF"/>
+              <a:rPr lang="en-US" sz="1700" dirty="0">
+                <a:solidFill>
+                  <a:srgbClr val="E0BE36"/>
                 </a:solidFill>
                 <a:latin typeface="Courier New" pitchFamily="34" charset="0"/>
                 <a:ea typeface="Courier New" pitchFamily="34" charset="-122"/>
                 <a:cs typeface="Courier New" pitchFamily="34" charset="-120"/>
               </a:rPr>
-              <a:t>, </a:t>
+              <a:t>"tip_ugx"</a:t>
             </a:r>
             <a:pPr algn="l" indent="0" marL="0">
               <a:lnSpc>
-                <a:spcPts val="2340"/>
+                <a:spcPts val="2210"/>
               </a:lnSpc>
               <a:buNone/>
             </a:pPr>
             <a:r>
-              <a:rPr lang="en-US" sz="1800" dirty="0">
-                <a:solidFill>
-                  <a:srgbClr val="E0BE36"/>
+              <a:rPr lang="en-US" sz="1700" dirty="0">
+                <a:solidFill>
+                  <a:srgbClr val="FFFFFF"/>
                 </a:solidFill>
                 <a:latin typeface="Courier New" pitchFamily="34" charset="0"/>
                 <a:ea typeface="Courier New" pitchFamily="34" charset="-122"/>
                 <a:cs typeface="Courier New" pitchFamily="34" charset="-120"/>
               </a:rPr>
-              <a:t>"tip_ugx"</a:t>
+              <a:t>, </a:t>
             </a:r>
             <a:pPr algn="l" indent="0" marL="0">
               <a:lnSpc>
-                <a:spcPts val="2340"/>
+                <a:spcPts val="2210"/>
               </a:lnSpc>
               <a:buNone/>
             </a:pPr>
             <a:r>
-              <a:rPr lang="en-US" sz="1800" dirty="0">
-                <a:solidFill>
-                  <a:srgbClr val="FFFFFF"/>
+              <a:rPr lang="en-US" sz="1700" dirty="0">
+                <a:solidFill>
+                  <a:srgbClr val="E0BE36"/>
                 </a:solidFill>
                 <a:latin typeface="Courier New" pitchFamily="34" charset="0"/>
                 <a:ea typeface="Courier New" pitchFamily="34" charset="-122"/>
                 <a:cs typeface="Courier New" pitchFamily="34" charset="-120"/>
               </a:rPr>
-              <a:t>,</a:t>
-            </a:r>
-            <a:endParaRPr lang="en-US" sz="1800" dirty="0"/>
-          </a:p>
-          <a:p>
+              <a:t>"fare_ugx"</a:t>
+            </a:r>
             <a:pPr algn="l" indent="0" marL="0">
               <a:lnSpc>
-                <a:spcPts val="2340"/>
+                <a:spcPts val="2210"/>
               </a:lnSpc>
               <a:buNone/>
             </a:pPr>
             <a:r>
-              <a:rPr lang="en-US" sz="1800" dirty="0">
+              <a:rPr lang="en-US" sz="1700" dirty="0">
                 <a:solidFill>
                   <a:srgbClr val="FFFFFF"/>
                 </a:solidFill>
@@ -8032,56 +8072,53 @@
                 <a:ea typeface="Courier New" pitchFamily="34" charset="-122"/>
                 <a:cs typeface="Courier New" pitchFamily="34" charset="-120"/>
               </a:rPr>
-              <a:t>        </a:t>
-            </a:r>
+              <a:t>]]</a:t>
+            </a:r>
+            <a:endParaRPr lang="en-US" sz="1700" dirty="0"/>
+          </a:p>
+          <a:p>
             <a:pPr algn="l" indent="0" marL="0">
               <a:lnSpc>
-                <a:spcPts val="2340"/>
+                <a:spcPts val="2210"/>
               </a:lnSpc>
               <a:buNone/>
             </a:pPr>
             <a:r>
-              <a:rPr lang="en-US" sz="1800" dirty="0">
-                <a:solidFill>
-                  <a:srgbClr val="E0BE36"/>
+              <a:rPr lang="en-US" sz="1700" dirty="0">
+                <a:solidFill>
+                  <a:srgbClr val="FFFFFF"/>
                 </a:solidFill>
                 <a:latin typeface="Courier New" pitchFamily="34" charset="0"/>
                 <a:ea typeface="Courier New" pitchFamily="34" charset="-122"/>
                 <a:cs typeface="Courier New" pitchFamily="34" charset="-120"/>
               </a:rPr>
-              <a:t>"fare_ugx"</a:t>
-            </a:r>
-            <a:endParaRPr lang="en-US" sz="1800" dirty="0"/>
-          </a:p>
-          <a:p>
+              <a:t>    .corr()[</a:t>
+            </a:r>
             <a:pPr algn="l" indent="0" marL="0">
               <a:lnSpc>
-                <a:spcPts val="2340"/>
+                <a:spcPts val="2210"/>
               </a:lnSpc>
               <a:buNone/>
             </a:pPr>
             <a:r>
-              <a:rPr lang="en-US" sz="1800" dirty="0">
-                <a:solidFill>
-                  <a:srgbClr val="FFFFFF"/>
+              <a:rPr lang="en-US" sz="1700" dirty="0">
+                <a:solidFill>
+                  <a:srgbClr val="E0BE36"/>
                 </a:solidFill>
                 <a:latin typeface="Courier New" pitchFamily="34" charset="0"/>
                 <a:ea typeface="Courier New" pitchFamily="34" charset="-122"/>
                 <a:cs typeface="Courier New" pitchFamily="34" charset="-120"/>
               </a:rPr>
-              <a:t>    ]</a:t>
-            </a:r>
-            <a:endParaRPr lang="en-US" sz="1800" dirty="0"/>
-          </a:p>
-          <a:p>
+              <a:t>"fare_ugx"</a:t>
+            </a:r>
             <a:pPr algn="l" indent="0" marL="0">
               <a:lnSpc>
-                <a:spcPts val="2340"/>
+                <a:spcPts val="2210"/>
               </a:lnSpc>
               <a:buNone/>
             </a:pPr>
             <a:r>
-              <a:rPr lang="en-US" sz="1800" dirty="0">
+              <a:rPr lang="en-US" sz="1700" dirty="0">
                 <a:solidFill>
                   <a:srgbClr val="FFFFFF"/>
                 </a:solidFill>
@@ -8089,33 +8126,39 @@
                 <a:ea typeface="Courier New" pitchFamily="34" charset="-122"/>
                 <a:cs typeface="Courier New" pitchFamily="34" charset="-120"/>
               </a:rPr>
-              <a:t>].corr()[</a:t>
-            </a:r>
+              <a:t>]</a:t>
+            </a:r>
+            <a:endParaRPr lang="en-US" sz="1700" dirty="0"/>
+          </a:p>
+          <a:p>
             <a:pPr algn="l" indent="0" marL="0">
               <a:lnSpc>
-                <a:spcPts val="2340"/>
+                <a:spcPts val="2210"/>
               </a:lnSpc>
               <a:buNone/>
             </a:pPr>
             <a:r>
-              <a:rPr lang="en-US" sz="1800" dirty="0">
-                <a:solidFill>
-                  <a:srgbClr val="E0BE36"/>
+              <a:rPr lang="en-US" sz="1700" dirty="0">
+                <a:solidFill>
+                  <a:srgbClr val="FFFFFF"/>
                 </a:solidFill>
                 <a:latin typeface="Courier New" pitchFamily="34" charset="0"/>
                 <a:ea typeface="Courier New" pitchFamily="34" charset="-122"/>
                 <a:cs typeface="Courier New" pitchFamily="34" charset="-120"/>
               </a:rPr>
-              <a:t>"fare_ugx"</a:t>
-            </a:r>
+              <a:t>    .round(2)</a:t>
+            </a:r>
+            <a:endParaRPr lang="en-US" sz="1700" dirty="0"/>
+          </a:p>
+          <a:p>
             <a:pPr algn="l" indent="0" marL="0">
               <a:lnSpc>
-                <a:spcPts val="2340"/>
+                <a:spcPts val="2210"/>
               </a:lnSpc>
               <a:buNone/>
             </a:pPr>
             <a:r>
-              <a:rPr lang="en-US" sz="1800" dirty="0">
+              <a:rPr lang="en-US" sz="1700" dirty="0">
                 <a:solidFill>
                   <a:srgbClr val="FFFFFF"/>
                 </a:solidFill>
@@ -8123,19 +8166,19 @@
                 <a:ea typeface="Courier New" pitchFamily="34" charset="-122"/>
                 <a:cs typeface="Courier New" pitchFamily="34" charset="-120"/>
               </a:rPr>
-              <a:t>].round(2)</a:t>
-            </a:r>
-            <a:endParaRPr lang="en-US" sz="1800" dirty="0"/>
+              <a:t>)</a:t>
+            </a:r>
+            <a:endParaRPr lang="en-US" sz="1700" dirty="0"/>
           </a:p>
           <a:p>
             <a:pPr algn="l" indent="0" marL="0">
               <a:lnSpc>
-                <a:spcPts val="2340"/>
+                <a:spcPts val="2210"/>
               </a:lnSpc>
               <a:buNone/>
             </a:pPr>
             <a:r>
-              <a:rPr lang="en-US" sz="1800" dirty="0">
+              <a:rPr lang="en-US" sz="1700" dirty="0">
                 <a:solidFill>
                   <a:srgbClr val="FFFFFF"/>
                 </a:solidFill>
@@ -8145,7 +8188,7 @@
               </a:rPr>
               <a:t>print(corr)</a:t>
             </a:r>
-            <a:endParaRPr lang="en-US" sz="1800" dirty="0"/>
+            <a:endParaRPr lang="en-US" sz="1700" dirty="0"/>
           </a:p>
         </p:txBody>
       </p:sp>
@@ -8157,8 +8200,8 @@
         </p:nvSpPr>
         <p:spPr>
           <a:xfrm>
-            <a:off x="640080" y="5212080"/>
-            <a:ext cx="8046720" cy="1051560"/>
+            <a:off x="640080" y="4793742"/>
+            <a:ext cx="8046720" cy="1469898"/>
           </a:xfrm>
           <a:prstGeom prst="rect">
             <a:avLst/>
@@ -8172,7 +8215,7 @@
           <a:p>
             <a:pPr algn="l" indent="0" marL="0">
               <a:lnSpc>
-                <a:spcPts val="2880"/>
+                <a:spcPts val="3120"/>
               </a:lnSpc>
               <a:spcAft>
                 <a:spcPts val="1010"/>
@@ -8180,7 +8223,7 @@
               <a:buNone/>
             </a:pPr>
             <a:r>
-              <a:rPr lang="en-US" sz="2400" dirty="0">
+              <a:rPr lang="en-US" sz="2600" dirty="0">
                 <a:solidFill>
                   <a:srgbClr val="111111"/>
                 </a:solidFill>
@@ -8190,12 +8233,12 @@
               </a:rPr>
               <a:t>Predict which column moves most closely with fare_ugx.</a:t>
             </a:r>
-            <a:endParaRPr lang="en-US" sz="2400" dirty="0"/>
+            <a:endParaRPr lang="en-US" sz="2600" dirty="0"/>
           </a:p>
           <a:p>
             <a:pPr algn="l" indent="0" marL="0">
               <a:lnSpc>
-                <a:spcPts val="2880"/>
+                <a:spcPts val="3120"/>
               </a:lnSpc>
               <a:spcAft>
                 <a:spcPts val="1010"/>
@@ -8203,7 +8246,7 @@
               <a:buNone/>
             </a:pPr>
             <a:r>
-              <a:rPr lang="en-US" sz="2400" dirty="0">
+              <a:rPr lang="en-US" sz="2600" dirty="0">
                 <a:solidFill>
                   <a:srgbClr val="111111"/>
                 </a:solidFill>
@@ -8213,7 +8256,7 @@
               </a:rPr>
               <a:t>Write your guess on paper before we run it.</a:t>
             </a:r>
-            <a:endParaRPr lang="en-US" sz="2400" dirty="0"/>
+            <a:endParaRPr lang="en-US" sz="2600" dirty="0"/>
           </a:p>
         </p:txBody>
       </p:sp>
@@ -8233,7 +8276,7 @@
         </p:blipFill>
         <p:spPr>
           <a:xfrm>
-            <a:off x="10241280" y="5214366"/>
+            <a:off x="10241280" y="5031486"/>
             <a:ext cx="1188720" cy="1046988"/>
           </a:xfrm>
           <a:prstGeom prst="rect">
